--- a/proposals/hatchik/hatchik-pitch-deck.pptx
+++ b/proposals/hatchik/hatchik-pitch-deck.pptx
@@ -3263,7 +3263,7 @@
                 <a:ea typeface="Inter" pitchFamily="34" charset="-122"/>
                 <a:cs typeface="Inter" pitchFamily="34" charset="-120"/>
               </a:rPr>
-              <a:t>The production substrate your AI coder builds on — </a:t>
+              <a:t xml:space="preserve">The production substrate your AI coder builds on — </a:t>
             </a:r>
             <a:pPr indent="0" marL="0">
               <a:buNone/>
@@ -4517,21 +4517,15 @@
           <a:bodyPr wrap="square" lIns="0" tIns="0" rIns="0" bIns="0" rtlCol="0" anchor="ctr"/>
           <a:lstStyle/>
           <a:p>
-            <a:pPr indent="0" marL="0">
-              <a:buNone/>
-            </a:pPr>
-            <a:r>
-              <a:rPr lang="en-US" sz="900" b="1" spc="400" kern="0" dirty="0">
-                <a:solidFill>
-                  <a:srgbClr val="3730A3"/>
-                </a:solidFill>
-                <a:latin typeface="JetBrains Mono" pitchFamily="34" charset="0"/>
-                <a:ea typeface="JetBrains Mono" pitchFamily="34" charset="-122"/>
-                <a:cs typeface="JetBrains Mono" pitchFamily="34" charset="-120"/>
-              </a:rPr>
-              <a:t>REPRICED  ·  UP FROM £9 / £24</a:t>
-            </a:r>
-            <a:endParaRPr lang="en-US" sz="900" dirty="0"/>
+            <a:r>
+              <a:rPr sz="1000" b="1">
+                <a:solidFill>
+                  <a:srgbClr val="F59E0B"/>
+                </a:solidFill>
+                <a:latin typeface="JetBrains Mono"/>
+              </a:rPr>
+              <a:t>REPRICED + AI COGS-ADJUSTED</a:t>
+            </a:r>
           </a:p>
         </p:txBody>
       </p:sp>
@@ -4556,9 +4550,6 @@
           <a:bodyPr wrap="square" lIns="0" tIns="0" rIns="0" bIns="0" rtlCol="0" anchor="ctr"/>
           <a:lstStyle/>
           <a:p>
-            <a:pPr indent="0" marL="0">
-              <a:buNone/>
-            </a:pPr>
             <a:r>
               <a:rPr lang="en-US" sz="1100" dirty="0">
                 <a:solidFill>
@@ -4568,9 +4559,8 @@
                 <a:ea typeface="Inter" pitchFamily="34" charset="-122"/>
                 <a:cs typeface="Inter" pitchFamily="34" charset="-120"/>
               </a:rPr>
-              <a:t>Original pricing was founder-empathy underpricing. Repriced to capture value in the hype window. Cursor Pro $25/mo and Lovable $25-100/mo precedents support the band. Bump lifts ongoing margin: Launch ~£0.50/mo → ~£4.40/mo; Growth ~£15.50/mo → ~£28.50/mo. Paddle handles MoR.</a:t>
-            </a:r>
-            <a:endParaRPr lang="en-US" sz="1100" dirty="0"/>
+              <a:t>After repricing AND subtracting AI passthrough COGS (~£1.50/mo Launch, ~£5/mo Growth) plus the £1.50/mo kept-sandbox-as-dev-env line, mid-range Launch ongoing margin is ~£0.64/mo (range −£2.24 to £2.78); Growth ~£19.95/mo (range £11.29 to £26.25). 30% overage markup on tokens past the included allowance adds 10–20% to margin on heavy users. Paddle handles MoR. Full sensitivity: AI_COGS_SENSITIVITY.xlsx.</a:t>
+            </a:r>
           </a:p>
         </p:txBody>
       </p:sp>
@@ -7717,21 +7707,15 @@
           <a:bodyPr wrap="square" lIns="0" tIns="0" rIns="0" bIns="0" rtlCol="0" anchor="ctr"/>
           <a:lstStyle/>
           <a:p>
-            <a:pPr indent="0" marL="0">
-              <a:buNone/>
-            </a:pPr>
-            <a:r>
-              <a:rPr lang="en-US" sz="1000" b="1" spc="400" kern="0" dirty="0">
-                <a:solidFill>
-                  <a:srgbClr val="4F46E5"/>
-                </a:solidFill>
-                <a:latin typeface="JetBrains Mono" pitchFamily="34" charset="0"/>
-                <a:ea typeface="JetBrains Mono" pitchFamily="34" charset="-122"/>
-                <a:cs typeface="JetBrains Mono" pitchFamily="34" charset="-120"/>
-              </a:rPr>
-              <a:t>PER-CUSTOMER MARGIN  ·  BEFORE → AFTER REPRICE</a:t>
-            </a:r>
-            <a:endParaRPr lang="en-US" sz="1000" dirty="0"/>
+            <a:r>
+              <a:rPr sz="1000" b="1">
+                <a:solidFill>
+                  <a:srgbClr val="F59E0B"/>
+                </a:solidFill>
+                <a:latin typeface="JetBrains Mono"/>
+              </a:rPr>
+              <a:t>PER-CUSTOMER MARGIN  ·  REPRICED  →  AI COGS-ADJUSTED</a:t>
+            </a:r>
           </a:p>
         </p:txBody>
       </p:sp>
@@ -7767,16 +7751,7 @@
                   <a:txBody>
                     <a:bodyPr/>
                     <a:lstStyle/>
-                    <a:p>
-                      <a:pPr indent="0" marL="0">
-                        <a:buNone/>
-                      </a:pPr>
-                      <a:endParaRPr lang="en-US" sz="1000" dirty="0">
-                        <a:latin typeface="Inter" charset="0"/>
-                        <a:ea typeface="Inter" charset="0"/>
-                        <a:cs typeface="Inter" charset="0"/>
-                      </a:endParaRPr>
-                    </a:p>
+                    <a:p/>
                   </a:txBody>
                   <a:tcPr marL="91440" marR="91440" marT="45720" marB="45720" anchor="ctr">
                     <a:lnL w="6350" cap="flat" cmpd="sng" algn="ctr">
@@ -7825,25 +7800,15 @@
                     <a:bodyPr/>
                     <a:lstStyle/>
                     <a:p>
-                      <a:pPr algn="ctr" indent="0" marL="0">
-                        <a:buNone/>
-                      </a:pPr>
                       <a:r>
-                        <a:rPr lang="en-US" sz="1100" b="1" dirty="0">
+                        <a:rPr sz="1000" b="1">
                           <a:solidFill>
-                            <a:srgbClr val="64748B"/>
+                            <a:srgbClr val="1E293B"/>
                           </a:solidFill>
-                          <a:latin typeface="Inter" pitchFamily="34" charset="0"/>
-                          <a:ea typeface="Inter" pitchFamily="34" charset="-122"/>
-                          <a:cs typeface="Inter" pitchFamily="34" charset="-120"/>
+                          <a:latin typeface="Inter"/>
                         </a:rPr>
-                        <a:t>Before (£9 / £24)</a:t>
+                        <a:t>After reprice</a:t>
                       </a:r>
-                      <a:endParaRPr lang="en-US" sz="1100" dirty="0">
-                        <a:latin typeface="Inter" charset="0"/>
-                        <a:ea typeface="Inter" charset="0"/>
-                        <a:cs typeface="Inter" charset="0"/>
-                      </a:endParaRPr>
                     </a:p>
                   </a:txBody>
                   <a:tcPr marL="91440" marR="91440" marT="45720" marB="45720" anchor="ctr">
@@ -7893,25 +7858,15 @@
                     <a:bodyPr/>
                     <a:lstStyle/>
                     <a:p>
-                      <a:pPr algn="ctr" indent="0" marL="0">
-                        <a:buNone/>
-                      </a:pPr>
                       <a:r>
-                        <a:rPr lang="en-US" sz="1100" b="1" dirty="0">
+                        <a:rPr sz="1000" b="1">
                           <a:solidFill>
-                            <a:srgbClr val="3730A3"/>
+                            <a:srgbClr val="1E293B"/>
                           </a:solidFill>
-                          <a:latin typeface="Inter" pitchFamily="34" charset="0"/>
-                          <a:ea typeface="Inter" pitchFamily="34" charset="-122"/>
-                          <a:cs typeface="Inter" pitchFamily="34" charset="-120"/>
+                          <a:latin typeface="Inter"/>
                         </a:rPr>
-                        <a:t>After (£14 / £39)</a:t>
+                        <a:t>After AI COGS (mid)</a:t>
                       </a:r>
-                      <a:endParaRPr lang="en-US" sz="1100" dirty="0">
-                        <a:latin typeface="Inter" charset="0"/>
-                        <a:ea typeface="Inter" charset="0"/>
-                        <a:cs typeface="Inter" charset="0"/>
-                      </a:endParaRPr>
                     </a:p>
                   </a:txBody>
                   <a:tcPr marL="91440" marR="91440" marT="45720" marB="45720" anchor="ctr">
@@ -7963,25 +7918,15 @@
                     <a:bodyPr/>
                     <a:lstStyle/>
                     <a:p>
-                      <a:pPr indent="0" marL="0">
-                        <a:buNone/>
-                      </a:pPr>
                       <a:r>
-                        <a:rPr lang="en-US" sz="1100" dirty="0">
+                        <a:rPr sz="1000">
                           <a:solidFill>
-                            <a:srgbClr val="1E293B"/>
+                            <a:srgbClr val="334155"/>
                           </a:solidFill>
-                          <a:latin typeface="Inter" pitchFamily="34" charset="0"/>
-                          <a:ea typeface="Inter" pitchFamily="34" charset="-122"/>
-                          <a:cs typeface="Inter" pitchFamily="34" charset="-120"/>
+                          <a:latin typeface="Inter"/>
                         </a:rPr>
                         <a:t>Launch ongoing/mo</a:t>
                       </a:r>
-                      <a:endParaRPr lang="en-US" sz="1100" dirty="0">
-                        <a:latin typeface="Inter" charset="0"/>
-                        <a:ea typeface="Inter" charset="0"/>
-                        <a:cs typeface="Inter" charset="0"/>
-                      </a:endParaRPr>
                     </a:p>
                   </a:txBody>
                   <a:tcPr marL="91440" marR="91440" marT="45720" marB="45720" anchor="ctr">
@@ -8031,25 +7976,15 @@
                     <a:bodyPr/>
                     <a:lstStyle/>
                     <a:p>
-                      <a:pPr algn="ctr" indent="0" marL="0">
-                        <a:buNone/>
-                      </a:pPr>
                       <a:r>
-                        <a:rPr lang="en-US" sz="1300" dirty="0">
+                        <a:rPr sz="1000">
                           <a:solidFill>
-                            <a:srgbClr val="64748B"/>
+                            <a:srgbClr val="334155"/>
                           </a:solidFill>
-                          <a:latin typeface="Inter" pitchFamily="34" charset="0"/>
-                          <a:ea typeface="Inter" pitchFamily="34" charset="-122"/>
-                          <a:cs typeface="Inter" pitchFamily="34" charset="-120"/>
+                          <a:latin typeface="Inter"/>
                         </a:rPr>
-                        <a:t>~£0.50</a:t>
+                        <a:t>~£4.40</a:t>
                       </a:r>
-                      <a:endParaRPr lang="en-US" sz="1300" dirty="0">
-                        <a:latin typeface="Inter" charset="0"/>
-                        <a:ea typeface="Inter" charset="0"/>
-                        <a:cs typeface="Inter" charset="0"/>
-                      </a:endParaRPr>
                     </a:p>
                   </a:txBody>
                   <a:tcPr marL="91440" marR="91440" marT="45720" marB="45720" anchor="ctr">
@@ -8099,25 +8034,15 @@
                     <a:bodyPr/>
                     <a:lstStyle/>
                     <a:p>
-                      <a:pPr algn="ctr" indent="0" marL="0">
-                        <a:buNone/>
-                      </a:pPr>
                       <a:r>
-                        <a:rPr lang="en-US" sz="1300" b="1" dirty="0">
+                        <a:rPr sz="1000">
                           <a:solidFill>
-                            <a:srgbClr val="1E293B"/>
+                            <a:srgbClr val="334155"/>
                           </a:solidFill>
-                          <a:latin typeface="Inter" pitchFamily="34" charset="0"/>
-                          <a:ea typeface="Inter" pitchFamily="34" charset="-122"/>
-                          <a:cs typeface="Inter" pitchFamily="34" charset="-120"/>
+                          <a:latin typeface="Inter"/>
                         </a:rPr>
-                        <a:t>~£4.40</a:t>
+                        <a:t>~£0.64</a:t>
                       </a:r>
-                      <a:endParaRPr lang="en-US" sz="1300" dirty="0">
-                        <a:latin typeface="Inter" charset="0"/>
-                        <a:ea typeface="Inter" charset="0"/>
-                        <a:cs typeface="Inter" charset="0"/>
-                      </a:endParaRPr>
                     </a:p>
                   </a:txBody>
                   <a:tcPr marL="91440" marR="91440" marT="45720" marB="45720" anchor="ctr">
@@ -8169,25 +8094,15 @@
                     <a:bodyPr/>
                     <a:lstStyle/>
                     <a:p>
-                      <a:pPr indent="0" marL="0">
-                        <a:buNone/>
-                      </a:pPr>
                       <a:r>
-                        <a:rPr lang="en-US" sz="1100" dirty="0">
+                        <a:rPr sz="1000">
                           <a:solidFill>
-                            <a:srgbClr val="1E293B"/>
+                            <a:srgbClr val="334155"/>
                           </a:solidFill>
-                          <a:latin typeface="Inter" pitchFamily="34" charset="0"/>
-                          <a:ea typeface="Inter" pitchFamily="34" charset="-122"/>
-                          <a:cs typeface="Inter" pitchFamily="34" charset="-120"/>
+                          <a:latin typeface="Inter"/>
                         </a:rPr>
                         <a:t>Launch ongoing/yr</a:t>
                       </a:r>
-                      <a:endParaRPr lang="en-US" sz="1100" dirty="0">
-                        <a:latin typeface="Inter" charset="0"/>
-                        <a:ea typeface="Inter" charset="0"/>
-                        <a:cs typeface="Inter" charset="0"/>
-                      </a:endParaRPr>
                     </a:p>
                   </a:txBody>
                   <a:tcPr marL="91440" marR="91440" marT="45720" marB="45720" anchor="ctr">
@@ -8237,25 +8152,15 @@
                     <a:bodyPr/>
                     <a:lstStyle/>
                     <a:p>
-                      <a:pPr algn="ctr" indent="0" marL="0">
-                        <a:buNone/>
-                      </a:pPr>
                       <a:r>
-                        <a:rPr lang="en-US" sz="1300" dirty="0">
+                        <a:rPr sz="1000">
                           <a:solidFill>
-                            <a:srgbClr val="64748B"/>
+                            <a:srgbClr val="334155"/>
                           </a:solidFill>
-                          <a:latin typeface="Inter" pitchFamily="34" charset="0"/>
-                          <a:ea typeface="Inter" pitchFamily="34" charset="-122"/>
-                          <a:cs typeface="Inter" pitchFamily="34" charset="-120"/>
+                          <a:latin typeface="Inter"/>
                         </a:rPr>
-                        <a:t>~£6</a:t>
+                        <a:t>~£53</a:t>
                       </a:r>
-                      <a:endParaRPr lang="en-US" sz="1300" dirty="0">
-                        <a:latin typeface="Inter" charset="0"/>
-                        <a:ea typeface="Inter" charset="0"/>
-                        <a:cs typeface="Inter" charset="0"/>
-                      </a:endParaRPr>
                     </a:p>
                   </a:txBody>
                   <a:tcPr marL="91440" marR="91440" marT="45720" marB="45720" anchor="ctr">
@@ -8305,25 +8210,15 @@
                     <a:bodyPr/>
                     <a:lstStyle/>
                     <a:p>
-                      <a:pPr algn="ctr" indent="0" marL="0">
-                        <a:buNone/>
-                      </a:pPr>
                       <a:r>
-                        <a:rPr lang="en-US" sz="1300" b="1" dirty="0">
+                        <a:rPr sz="1000">
                           <a:solidFill>
-                            <a:srgbClr val="1E293B"/>
+                            <a:srgbClr val="334155"/>
                           </a:solidFill>
-                          <a:latin typeface="Inter" pitchFamily="34" charset="0"/>
-                          <a:ea typeface="Inter" pitchFamily="34" charset="-122"/>
-                          <a:cs typeface="Inter" pitchFamily="34" charset="-120"/>
+                          <a:latin typeface="Inter"/>
                         </a:rPr>
-                        <a:t>~£53</a:t>
+                        <a:t>~£8</a:t>
                       </a:r>
-                      <a:endParaRPr lang="en-US" sz="1300" dirty="0">
-                        <a:latin typeface="Inter" charset="0"/>
-                        <a:ea typeface="Inter" charset="0"/>
-                        <a:cs typeface="Inter" charset="0"/>
-                      </a:endParaRPr>
                     </a:p>
                   </a:txBody>
                   <a:tcPr marL="91440" marR="91440" marT="45720" marB="45720" anchor="ctr">
@@ -8375,25 +8270,15 @@
                     <a:bodyPr/>
                     <a:lstStyle/>
                     <a:p>
-                      <a:pPr indent="0" marL="0">
-                        <a:buNone/>
-                      </a:pPr>
                       <a:r>
-                        <a:rPr lang="en-US" sz="1100" dirty="0">
+                        <a:rPr sz="1000">
                           <a:solidFill>
-                            <a:srgbClr val="1E293B"/>
+                            <a:srgbClr val="334155"/>
                           </a:solidFill>
-                          <a:latin typeface="Inter" pitchFamily="34" charset="0"/>
-                          <a:ea typeface="Inter" pitchFamily="34" charset="-122"/>
-                          <a:cs typeface="Inter" pitchFamily="34" charset="-120"/>
+                          <a:latin typeface="Inter"/>
                         </a:rPr>
                         <a:t>Growth ongoing/yr</a:t>
                       </a:r>
-                      <a:endParaRPr lang="en-US" sz="1100" dirty="0">
-                        <a:latin typeface="Inter" charset="0"/>
-                        <a:ea typeface="Inter" charset="0"/>
-                        <a:cs typeface="Inter" charset="0"/>
-                      </a:endParaRPr>
                     </a:p>
                   </a:txBody>
                   <a:tcPr marL="91440" marR="91440" marT="45720" marB="45720" anchor="ctr">
@@ -8443,25 +8328,15 @@
                     <a:bodyPr/>
                     <a:lstStyle/>
                     <a:p>
-                      <a:pPr algn="ctr" indent="0" marL="0">
-                        <a:buNone/>
-                      </a:pPr>
                       <a:r>
-                        <a:rPr lang="en-US" sz="1300" dirty="0">
+                        <a:rPr sz="1000">
                           <a:solidFill>
-                            <a:srgbClr val="64748B"/>
+                            <a:srgbClr val="334155"/>
                           </a:solidFill>
-                          <a:latin typeface="Inter" pitchFamily="34" charset="0"/>
-                          <a:ea typeface="Inter" pitchFamily="34" charset="-122"/>
-                          <a:cs typeface="Inter" pitchFamily="34" charset="-120"/>
+                          <a:latin typeface="Inter"/>
                         </a:rPr>
-                        <a:t>~£186</a:t>
+                        <a:t>~£353</a:t>
                       </a:r>
-                      <a:endParaRPr lang="en-US" sz="1300" dirty="0">
-                        <a:latin typeface="Inter" charset="0"/>
-                        <a:ea typeface="Inter" charset="0"/>
-                        <a:cs typeface="Inter" charset="0"/>
-                      </a:endParaRPr>
                     </a:p>
                   </a:txBody>
                   <a:tcPr marL="91440" marR="91440" marT="45720" marB="45720" anchor="ctr">
@@ -8511,25 +8386,15 @@
                     <a:bodyPr/>
                     <a:lstStyle/>
                     <a:p>
-                      <a:pPr algn="ctr" indent="0" marL="0">
-                        <a:buNone/>
-                      </a:pPr>
                       <a:r>
-                        <a:rPr lang="en-US" sz="1300" b="1" dirty="0">
+                        <a:rPr sz="1000">
                           <a:solidFill>
-                            <a:srgbClr val="1E293B"/>
+                            <a:srgbClr val="334155"/>
                           </a:solidFill>
-                          <a:latin typeface="Inter" pitchFamily="34" charset="0"/>
-                          <a:ea typeface="Inter" pitchFamily="34" charset="-122"/>
-                          <a:cs typeface="Inter" pitchFamily="34" charset="-120"/>
+                          <a:latin typeface="Inter"/>
                         </a:rPr>
-                        <a:t>~£353</a:t>
+                        <a:t>~£239</a:t>
                       </a:r>
-                      <a:endParaRPr lang="en-US" sz="1300" dirty="0">
-                        <a:latin typeface="Inter" charset="0"/>
-                        <a:ea typeface="Inter" charset="0"/>
-                        <a:cs typeface="Inter" charset="0"/>
-                      </a:endParaRPr>
                     </a:p>
                   </a:txBody>
                   <a:tcPr marL="91440" marR="91440" marT="45720" marB="45720" anchor="ctr">
@@ -8743,7 +8608,7 @@
                 <a:ea typeface="Inter" pitchFamily="34" charset="-122"/>
                 <a:cs typeface="Inter" pitchFamily="34" charset="-120"/>
               </a:rPr>
-              <a:t> </a:t>
+              <a:t xml:space="preserve"> </a:t>
             </a:r>
             <a:endParaRPr lang="en-US" sz="1400" dirty="0"/>
           </a:p>
@@ -8859,24 +8724,21 @@
         </p:nvSpPr>
         <p:spPr>
           <a:xfrm>
-            <a:off x="777240" y="4937760"/>
-            <a:ext cx="10698480" cy="1417320"/>
-          </a:xfrm>
-          <a:prstGeom prst="rect">
-            <a:avLst/>
-          </a:prstGeom>
-          <a:noFill/>
-          <a:ln/>
-        </p:spPr>
-        <p:txBody>
-          <a:bodyPr wrap="square" lIns="0" tIns="0" rIns="0" bIns="0" rtlCol="0" anchor="ctr"/>
-          <a:lstStyle/>
-          <a:p>
-            <a:pPr indent="0" marL="0">
-              <a:buNone/>
-            </a:pPr>
-            <a:r>
-              <a:rPr lang="en-US" sz="1600" b="1" dirty="0">
+            <a:off x="777240" y="5029200"/>
+            <a:ext cx="10698480" cy="1325880"/>
+          </a:xfrm>
+          <a:prstGeom prst="rect">
+            <a:avLst/>
+          </a:prstGeom>
+          <a:noFill/>
+          <a:ln/>
+        </p:spPr>
+        <p:txBody>
+          <a:bodyPr wrap="square" lIns="0" tIns="0" rIns="0" bIns="0" rtlCol="0" anchor="ctr"/>
+          <a:lstStyle/>
+          <a:p>
+            <a:r>
+              <a:rPr lang="en-US" sz="1100" b="1" dirty="0">
                 <a:solidFill>
                   <a:srgbClr val="FFFFFF"/>
                 </a:solidFill>
@@ -8886,16 +8748,12 @@
               </a:rPr>
               <a:t>Sprint base = real business. Sprint upside = acquirable or fundable.</a:t>
             </a:r>
-            <a:endParaRPr lang="en-US" sz="1600" dirty="0"/>
-          </a:p>
-          <a:p>
-            <a:pPr indent="0" marL="0">
-              <a:buNone/>
-            </a:pPr>
-            <a:r>
-              <a:rPr lang="en-US" sz="600" dirty="0">
-                <a:solidFill>
-                  <a:srgbClr val="000000"/>
+          </a:p>
+          <a:p>
+            <a:r>
+              <a:rPr lang="en-US" sz="1100" b="1" dirty="0">
+                <a:solidFill>
+                  <a:srgbClr val="FFFFFF"/>
                 </a:solidFill>
                 <a:latin typeface="Inter" pitchFamily="34" charset="0"/>
                 <a:ea typeface="Inter" pitchFamily="34" charset="-122"/>
@@ -8903,38 +8761,19 @@
               </a:rPr>
               <a:t> </a:t>
             </a:r>
-            <a:endParaRPr lang="en-US" sz="1600" dirty="0"/>
-          </a:p>
-          <a:p>
-            <a:pPr indent="0" marL="0">
-              <a:buNone/>
-            </a:pPr>
-            <a:r>
-              <a:rPr lang="en-US" sz="1200" dirty="0">
-                <a:solidFill>
-                  <a:srgbClr val="CBD5E1"/>
+          </a:p>
+          <a:p>
+            <a:r>
+              <a:rPr lang="en-US" sz="1100" b="1" dirty="0">
+                <a:solidFill>
+                  <a:srgbClr val="FFFFFF"/>
                 </a:solidFill>
                 <a:latin typeface="Inter" pitchFamily="34" charset="0"/>
                 <a:ea typeface="Inter" pitchFamily="34" charset="-122"/>
                 <a:cs typeface="Inter" pitchFamily="34" charset="-120"/>
               </a:rPr>
-              <a:t>Repricing lifts Launch margin ~9× and roughly doubles Growth margin per customer. </a:t>
-            </a:r>
-            <a:pPr indent="0" marL="0">
-              <a:buNone/>
-            </a:pPr>
-            <a:r>
-              <a:rPr lang="en-US" sz="1200" dirty="0">
-                <a:solidFill>
-                  <a:srgbClr val="CBD5E1"/>
-                </a:solidFill>
-                <a:latin typeface="Inter" pitchFamily="34" charset="0"/>
-                <a:ea typeface="Inter" pitchFamily="34" charset="-122"/>
-                <a:cs typeface="Inter" pitchFamily="34" charset="-120"/>
-              </a:rPr>
-              <a:t>Year-1 OPEX target ≈£90K (marketing £35K · modest hires £25K · legal/accounting £10K · sandbox overruns £8K · contingency £8K · tools £3K · support £1K) — no founder draw included; EBITDA figures are pre-comp. Sprint base clears £300K+ EBITDA at month 12 with ~5,000 paying. Sprint upside produces the metric profile that triggers pre-seed-into-seed or strategic-acquisition conversations.</a:t>
-            </a:r>
-            <a:endParaRPr lang="en-US" sz="1600" dirty="0"/>
+              <a:t>Subtracting AI COGS + the £1.50/mo kept-sandbox line pulls mid-range Launch margin to ~£0.64/mo (range −£2.24 to £2.78) and Growth to ~£19.95/mo (range £11.29 to £26.25). 30% overage markup adds 10–20% on heavy users. On a 1000-customer 80/20 cohort the AI-COGS + kept-sandbox haircut to Y1 gross is ~£33K (~21%) — material, but knowable. Year-1 OPEX target ≈£90K (pre-founder-comp). Full sensitivity: AI_COGS_SENSITIVITY.xlsx.</a:t>
+            </a:r>
           </a:p>
         </p:txBody>
       </p:sp>
@@ -22192,7 +22031,7 @@
                 <a:ea typeface="Inter" pitchFamily="34" charset="-122"/>
                 <a:cs typeface="Inter" pitchFamily="34" charset="-120"/>
               </a:rPr>
-              <a:t>  users globally  ·  </a:t>
+              <a:t xml:space="preserve">  users globally  ·  </a:t>
             </a:r>
             <a:pPr indent="0" marL="0">
               <a:buNone/>
@@ -22337,7 +22176,7 @@
                 <a:ea typeface="Inter" pitchFamily="34" charset="-122"/>
                 <a:cs typeface="Inter" pitchFamily="34" charset="-120"/>
               </a:rPr>
-              <a:t>  users  ·  </a:t>
+              <a:t xml:space="preserve">  users  ·  </a:t>
             </a:r>
             <a:pPr indent="0" marL="0">
               <a:buNone/>
@@ -27517,7 +27356,7 @@
                 <a:ea typeface="Inter" pitchFamily="34" charset="-122"/>
                 <a:cs typeface="Inter" pitchFamily="34" charset="-120"/>
               </a:rPr>
-              <a:t>  full  </a:t>
+              <a:t xml:space="preserve">  full  </a:t>
             </a:r>
             <a:pPr indent="0" marL="0">
               <a:buNone/>
@@ -27545,7 +27384,7 @@
                 <a:ea typeface="Inter" pitchFamily="34" charset="-122"/>
                 <a:cs typeface="Inter" pitchFamily="34" charset="-120"/>
               </a:rPr>
-              <a:t>  partial  </a:t>
+              <a:t xml:space="preserve">  partial  </a:t>
             </a:r>
             <a:pPr indent="0" marL="0">
               <a:buNone/>
@@ -27573,7 +27412,7 @@
                 <a:ea typeface="Inter" pitchFamily="34" charset="-122"/>
                 <a:cs typeface="Inter" pitchFamily="34" charset="-120"/>
               </a:rPr>
-              <a:t>  not supported</a:t>
+              <a:t xml:space="preserve">  not supported</a:t>
             </a:r>
             <a:endParaRPr lang="en-US" sz="1000" dirty="0"/>
           </a:p>
